--- a/Introduccion a la Ingenieria/Clases/Presentacion del Curso - Introduccion a la Ingenieria - LB141F.pptx
+++ b/Introduccion a la Ingenieria/Clases/Presentacion del Curso - Introduccion a la Ingenieria - LB141F.pptx
@@ -8175,7 +8175,7 @@
               </a:spcAft>
             </a:pPr>
             <a:r>
-              <a:rPr sz="1600" b="0" i="0">
+              <a:rPr sz="2000" b="0" i="0">
                 <a:solidFill>
                   <a:srgbClr val="333333"/>
                 </a:solidFill>
@@ -8184,7 +8184,7 @@
               <a:t>–   </a:t>
             </a:r>
             <a:r>
-              <a:rPr sz="1600" b="1" i="0">
+              <a:rPr sz="2000" b="1" i="0">
                 <a:solidFill>
                   <a:srgbClr val="333333"/>
                 </a:solidFill>
@@ -8193,7 +8193,7 @@
               <a:t>Objeto de estudio:</a:t>
             </a:r>
             <a:r>
-              <a:rPr sz="1600" b="0" i="0">
+              <a:rPr sz="2000" b="0" i="0">
                 <a:solidFill>
                   <a:srgbClr val="333333"/>
                 </a:solidFill>
@@ -8209,7 +8209,7 @@
               </a:spcAft>
             </a:pPr>
             <a:r>
-              <a:rPr sz="1600" b="0" i="0">
+              <a:rPr sz="2000" b="0" i="0">
                 <a:solidFill>
                   <a:srgbClr val="333333"/>
                 </a:solidFill>
@@ -8218,7 +8218,7 @@
               <a:t>–   Es el curso de </a:t>
             </a:r>
             <a:r>
-              <a:rPr sz="1600" b="1" i="0">
+              <a:rPr sz="2000" b="1" i="0">
                 <a:solidFill>
                   <a:srgbClr val="333333"/>
                 </a:solidFill>
@@ -8227,7 +8227,7 @@
               <a:t>primer semestre</a:t>
             </a:r>
             <a:r>
-              <a:rPr sz="1600" b="0" i="0">
+              <a:rPr sz="2000" b="0" i="0">
                 <a:solidFill>
                   <a:srgbClr val="333333"/>
                 </a:solidFill>
@@ -8236,7 +8236,7 @@
               <a:t> que responde una pregunta concreta: </a:t>
             </a:r>
             <a:r>
-              <a:rPr sz="1600" b="1" i="0">
+              <a:rPr sz="2000" b="1" i="0">
                 <a:solidFill>
                   <a:srgbClr val="333333"/>
                 </a:solidFill>
@@ -8252,7 +8252,7 @@
               </a:spcAft>
             </a:pPr>
             <a:r>
-              <a:rPr sz="1600" b="0" i="0">
+              <a:rPr sz="2000" b="0" i="0">
                 <a:solidFill>
                   <a:srgbClr val="333333"/>
                 </a:solidFill>
@@ -8261,7 +8261,7 @@
               <a:t>–   No se programa todavía. Se aprende a </a:t>
             </a:r>
             <a:r>
-              <a:rPr sz="1600" b="1" i="0">
+              <a:rPr sz="2000" b="1" i="0">
                 <a:solidFill>
                   <a:srgbClr val="333333"/>
                 </a:solidFill>
@@ -8270,7 +8270,7 @@
               <a:t>mirar un problema del entorno</a:t>
             </a:r>
             <a:r>
-              <a:rPr sz="1600" b="0" i="0">
+              <a:rPr sz="2000" b="0" i="0">
                 <a:solidFill>
                   <a:srgbClr val="333333"/>
                 </a:solidFill>
@@ -8286,7 +8286,7 @@
               </a:spcAft>
             </a:pPr>
             <a:r>
-              <a:rPr sz="1600" b="0" i="0">
+              <a:rPr sz="2000" b="0" i="0">
                 <a:solidFill>
                   <a:srgbClr val="333333"/>
                 </a:solidFill>
@@ -8295,7 +8295,7 @@
               <a:t>–   </a:t>
             </a:r>
             <a:r>
-              <a:rPr sz="1600" b="1" i="0">
+              <a:rPr sz="2000" b="1" i="0">
                 <a:solidFill>
                   <a:srgbClr val="333333"/>
                 </a:solidFill>
@@ -8304,7 +8304,7 @@
               <a:t>Objetivo:</a:t>
             </a:r>
             <a:r>
-              <a:rPr sz="1600" b="0" i="0">
+              <a:rPr sz="2000" b="0" i="0">
                 <a:solidFill>
                   <a:srgbClr val="333333"/>
                 </a:solidFill>
@@ -8320,7 +8320,7 @@
               </a:spcAft>
             </a:pPr>
             <a:r>
-              <a:rPr sz="1600" b="0" i="0">
+              <a:rPr sz="2000" b="0" i="0">
                 <a:solidFill>
                   <a:srgbClr val="333333"/>
                 </a:solidFill>
@@ -8329,7 +8329,7 @@
               <a:t>–   Créditos: </a:t>
             </a:r>
             <a:r>
-              <a:rPr sz="1600" b="1" i="0">
+              <a:rPr sz="2000" b="1" i="0">
                 <a:solidFill>
                   <a:srgbClr val="333333"/>
                 </a:solidFill>
@@ -8338,7 +8338,7 @@
               <a:t>2</a:t>
             </a:r>
             <a:r>
-              <a:rPr sz="1600" b="0" i="0">
+              <a:rPr sz="2000" b="0" i="0">
                 <a:solidFill>
                   <a:srgbClr val="333333"/>
                 </a:solidFill>
@@ -8347,7 +8347,7 @@
               <a:t> · Tipo: </a:t>
             </a:r>
             <a:r>
-              <a:rPr sz="1600" b="1" i="0">
+              <a:rPr sz="2000" b="1" i="0">
                 <a:solidFill>
                   <a:srgbClr val="333333"/>
                 </a:solidFill>
@@ -8356,7 +8356,7 @@
               <a:t>Teórica / Práctica</a:t>
             </a:r>
             <a:r>
-              <a:rPr sz="1600" b="0" i="0">
+              <a:rPr sz="2000" b="0" i="0">
                 <a:solidFill>
                   <a:srgbClr val="333333"/>
                 </a:solidFill>
@@ -8365,7 +8365,7 @@
               <a:t> · Habilitable: </a:t>
             </a:r>
             <a:r>
-              <a:rPr sz="1600" b="1" i="0">
+              <a:rPr sz="2000" b="1" i="0">
                 <a:solidFill>
                   <a:srgbClr val="333333"/>
                 </a:solidFill>
@@ -8585,7 +8585,7 @@
               </a:spcAft>
             </a:pPr>
             <a:r>
-              <a:rPr sz="1600" b="0" i="0">
+              <a:rPr sz="2000" b="0" i="0">
                 <a:solidFill>
                   <a:srgbClr val="333333"/>
                 </a:solidFill>
@@ -8594,7 +8594,7 @@
               <a:t>–   </a:t>
             </a:r>
             <a:r>
-              <a:rPr sz="1600" b="1" i="0">
+              <a:rPr sz="2000" b="1" i="0">
                 <a:solidFill>
                   <a:srgbClr val="333333"/>
                 </a:solidFill>
@@ -8603,7 +8603,7 @@
               <a:t>RAP del programa:</a:t>
             </a:r>
             <a:r>
-              <a:rPr sz="1600" b="0" i="0">
+              <a:rPr sz="2000" b="0" i="0">
                 <a:solidFill>
                   <a:srgbClr val="333333"/>
                 </a:solidFill>
@@ -8619,7 +8619,7 @@
               </a:spcAft>
             </a:pPr>
             <a:r>
-              <a:rPr sz="1600" b="0" i="0">
+              <a:rPr sz="2000" b="0" i="0">
                 <a:solidFill>
                   <a:srgbClr val="333333"/>
                 </a:solidFill>
@@ -8628,7 +8628,7 @@
               <a:t>–   </a:t>
             </a:r>
             <a:r>
-              <a:rPr sz="1600" b="1" i="0">
+              <a:rPr sz="2000" b="1" i="0">
                 <a:solidFill>
                   <a:srgbClr val="333333"/>
                 </a:solidFill>
@@ -8637,7 +8637,7 @@
               <a:t>RAA1</a:t>
             </a:r>
             <a:r>
-              <a:rPr sz="1600" b="0" i="0">
+              <a:rPr sz="2000" b="0" i="0">
                 <a:solidFill>
                   <a:srgbClr val="333333"/>
                 </a:solidFill>
@@ -8653,7 +8653,7 @@
               </a:spcAft>
             </a:pPr>
             <a:r>
-              <a:rPr sz="1600" b="0" i="0">
+              <a:rPr sz="2000" b="0" i="0">
                 <a:solidFill>
                   <a:srgbClr val="333333"/>
                 </a:solidFill>
@@ -8662,7 +8662,7 @@
               <a:t>–   </a:t>
             </a:r>
             <a:r>
-              <a:rPr sz="1600" b="1" i="0">
+              <a:rPr sz="2000" b="1" i="0">
                 <a:solidFill>
                   <a:srgbClr val="333333"/>
                 </a:solidFill>
@@ -8671,7 +8671,7 @@
               <a:t>RAA2</a:t>
             </a:r>
             <a:r>
-              <a:rPr sz="1600" b="0" i="0">
+              <a:rPr sz="2000" b="0" i="0">
                 <a:solidFill>
                   <a:srgbClr val="333333"/>
                 </a:solidFill>
@@ -8687,7 +8687,7 @@
               </a:spcAft>
             </a:pPr>
             <a:r>
-              <a:rPr sz="1600" b="0" i="0">
+              <a:rPr sz="2000" b="0" i="0">
                 <a:solidFill>
                   <a:srgbClr val="333333"/>
                 </a:solidFill>
@@ -8696,7 +8696,7 @@
               <a:t>–   </a:t>
             </a:r>
             <a:r>
-              <a:rPr sz="1600" b="1" i="0">
+              <a:rPr sz="2000" b="1" i="0">
                 <a:solidFill>
                   <a:srgbClr val="333333"/>
                 </a:solidFill>
@@ -8705,7 +8705,7 @@
               <a:t>RAA3</a:t>
             </a:r>
             <a:r>
-              <a:rPr sz="1600" b="0" i="0">
+              <a:rPr sz="2000" b="0" i="0">
                 <a:solidFill>
                   <a:srgbClr val="333333"/>
                 </a:solidFill>
@@ -8721,7 +8721,7 @@
               </a:spcAft>
             </a:pPr>
             <a:r>
-              <a:rPr sz="1600" b="0" i="0">
+              <a:rPr sz="2000" b="0" i="0">
                 <a:solidFill>
                   <a:srgbClr val="333333"/>
                 </a:solidFill>
@@ -8730,7 +8730,7 @@
               <a:t>–   </a:t>
             </a:r>
             <a:r>
-              <a:rPr sz="1600" b="1" i="0">
+              <a:rPr sz="2000" b="1" i="0">
                 <a:solidFill>
                   <a:srgbClr val="333333"/>
                 </a:solidFill>
@@ -8739,7 +8739,7 @@
               <a:t>Cómo se demuestran:</a:t>
             </a:r>
             <a:r>
-              <a:rPr sz="1600" b="0" i="0">
+              <a:rPr sz="2000" b="0" i="0">
                 <a:solidFill>
                   <a:srgbClr val="333333"/>
                 </a:solidFill>
@@ -8748,7 +8748,7 @@
               <a:t> no con un examen final, sino con el </a:t>
             </a:r>
             <a:r>
-              <a:rPr sz="1600" b="1" i="0">
+              <a:rPr sz="2000" b="1" i="0">
                 <a:solidFill>
                   <a:srgbClr val="333333"/>
                 </a:solidFill>
@@ -8757,7 +8757,7 @@
               <a:t>proyecto del equipo</a:t>
             </a:r>
             <a:r>
-              <a:rPr sz="1600" b="0" i="0">
+              <a:rPr sz="2000" b="0" i="0">
                 <a:solidFill>
                   <a:srgbClr val="333333"/>
                 </a:solidFill>
@@ -9115,7 +9115,7 @@
         <p:spPr>
           <a:xfrm>
             <a:off x="502920" y="2798064"/>
-            <a:ext cx="2164019" cy="2560320"/>
+            <a:ext cx="2164019" cy="3099816"/>
           </a:xfrm>
           <a:prstGeom prst="rect">
             <a:avLst/>
@@ -9239,7 +9239,7 @@
         <p:spPr>
           <a:xfrm>
             <a:off x="2758379" y="2798064"/>
-            <a:ext cx="2164019" cy="2560320"/>
+            <a:ext cx="2164019" cy="3099816"/>
           </a:xfrm>
           <a:prstGeom prst="rect">
             <a:avLst/>
@@ -9363,7 +9363,7 @@
         <p:spPr>
           <a:xfrm>
             <a:off x="5013838" y="2798064"/>
-            <a:ext cx="2164019" cy="2560320"/>
+            <a:ext cx="2164019" cy="3099816"/>
           </a:xfrm>
           <a:prstGeom prst="rect">
             <a:avLst/>
@@ -9487,7 +9487,7 @@
         <p:spPr>
           <a:xfrm>
             <a:off x="7269297" y="2798064"/>
-            <a:ext cx="2164019" cy="2560320"/>
+            <a:ext cx="2164019" cy="3099816"/>
           </a:xfrm>
           <a:prstGeom prst="rect">
             <a:avLst/>
@@ -9611,7 +9611,7 @@
         <p:spPr>
           <a:xfrm>
             <a:off x="9524756" y="2798064"/>
-            <a:ext cx="2164019" cy="2560320"/>
+            <a:ext cx="2164019" cy="3099816"/>
           </a:xfrm>
           <a:prstGeom prst="rect">
             <a:avLst/>
@@ -9654,8 +9654,8 @@
         </p:nvSpPr>
         <p:spPr>
           <a:xfrm>
-            <a:off x="457200" y="5943600"/>
-            <a:ext cx="11277295" cy="365760"/>
+            <a:off x="457200" y="5806440"/>
+            <a:ext cx="11277295" cy="640080"/>
           </a:xfrm>
           <a:prstGeom prst="rect">
             <a:avLst/>
@@ -10736,7 +10736,7 @@
               </a:spcAft>
             </a:pPr>
             <a:r>
-              <a:rPr sz="1600" b="0" i="0">
+              <a:rPr sz="2000" b="0" i="0">
                 <a:solidFill>
                   <a:srgbClr val="333333"/>
                 </a:solidFill>
@@ -10745,7 +10745,7 @@
               <a:t>–   </a:t>
             </a:r>
             <a:r>
-              <a:rPr sz="1600" b="1" i="0">
+              <a:rPr sz="2000" b="1" i="0">
                 <a:solidFill>
                   <a:srgbClr val="333333"/>
                 </a:solidFill>
@@ -10754,7 +10754,7 @@
               <a:t>Lo fijo son los equipos: 5.</a:t>
             </a:r>
             <a:r>
-              <a:rPr sz="1600" b="0" i="0">
+              <a:rPr sz="2000" b="0" i="0">
                 <a:solidFill>
                   <a:srgbClr val="333333"/>
                 </a:solidFill>
@@ -10763,7 +10763,7 @@
               <a:t> Lo que cambia con la cantidad de matriculados es </a:t>
             </a:r>
             <a:r>
-              <a:rPr sz="1600" b="1" i="0">
+              <a:rPr sz="2000" b="1" i="0">
                 <a:solidFill>
                   <a:srgbClr val="333333"/>
                 </a:solidFill>
@@ -10772,7 +10772,7 @@
               <a:t>cuánta gente hay en cada uno</a:t>
             </a:r>
             <a:r>
-              <a:rPr sz="1600" b="0" i="0">
+              <a:rPr sz="2000" b="0" i="0">
                 <a:solidFill>
                   <a:srgbClr val="333333"/>
                 </a:solidFill>
@@ -10788,7 +10788,7 @@
               </a:spcAft>
             </a:pPr>
             <a:r>
-              <a:rPr sz="1600" b="0" i="0">
+              <a:rPr sz="2000" b="0" i="0">
                 <a:solidFill>
                   <a:srgbClr val="333333"/>
                 </a:solidFill>
@@ -10797,7 +10797,7 @@
               <a:t>–   </a:t>
             </a:r>
             <a:r>
-              <a:rPr sz="1600" b="1" i="0">
+              <a:rPr sz="2000" b="1" i="0">
                 <a:solidFill>
                   <a:srgbClr val="333333"/>
                 </a:solidFill>
@@ -10806,7 +10806,7 @@
               <a:t>5 equipos × 3 min = 15 min de exposiciones.</a:t>
             </a:r>
             <a:r>
-              <a:rPr sz="1600" b="0" i="0">
+              <a:rPr sz="2000" b="0" i="0">
                 <a:solidFill>
                   <a:srgbClr val="333333"/>
                 </a:solidFill>
@@ -10822,7 +10822,7 @@
               </a:spcAft>
             </a:pPr>
             <a:r>
-              <a:rPr sz="1600" b="0" i="0">
+              <a:rPr sz="2000" b="0" i="0">
                 <a:solidFill>
                   <a:srgbClr val="333333"/>
                 </a:solidFill>
@@ -10831,7 +10831,7 @@
               <a:t>–   Si lo fijo fuera el tamaño («de 4 en 4»), un grupo de 35 daría </a:t>
             </a:r>
             <a:r>
-              <a:rPr sz="1600" b="1" i="0">
+              <a:rPr sz="2000" b="1" i="0">
                 <a:solidFill>
                   <a:srgbClr val="333333"/>
                 </a:solidFill>
@@ -10840,7 +10840,7 @@
               <a:t>9 equipos = 27 min</a:t>
             </a:r>
             <a:r>
-              <a:rPr sz="1600" b="0" i="0">
+              <a:rPr sz="2000" b="0" i="0">
                 <a:solidFill>
                   <a:srgbClr val="333333"/>
                 </a:solidFill>
@@ -10856,7 +10856,7 @@
               </a:spcAft>
             </a:pPr>
             <a:r>
-              <a:rPr sz="1600" b="0" i="0">
+              <a:rPr sz="2000" b="0" i="0">
                 <a:solidFill>
                   <a:srgbClr val="333333"/>
                 </a:solidFill>
@@ -10865,7 +10865,7 @@
               <a:t>–   Con </a:t>
             </a:r>
             <a:r>
-              <a:rPr sz="1600" b="1" i="0">
+              <a:rPr sz="2000" b="1" i="0">
                 <a:solidFill>
                   <a:srgbClr val="333333"/>
                 </a:solidFill>
@@ -10874,7 +10874,7 @@
               <a:t>20</a:t>
             </a:r>
             <a:r>
-              <a:rPr sz="1600" b="0" i="0">
+              <a:rPr sz="2000" b="0" i="0">
                 <a:solidFill>
                   <a:srgbClr val="333333"/>
                 </a:solidFill>
@@ -10883,7 +10883,7 @@
               <a:t> matriculados, equipos de </a:t>
             </a:r>
             <a:r>
-              <a:rPr sz="1600" b="1" i="0">
+              <a:rPr sz="2000" b="1" i="0">
                 <a:solidFill>
                   <a:srgbClr val="333333"/>
                 </a:solidFill>
@@ -10892,7 +10892,7 @@
               <a:t>4</a:t>
             </a:r>
             <a:r>
-              <a:rPr sz="1600" b="0" i="0">
+              <a:rPr sz="2000" b="0" i="0">
                 <a:solidFill>
                   <a:srgbClr val="333333"/>
                 </a:solidFill>
@@ -10901,7 +10901,7 @@
               <a:t>; con </a:t>
             </a:r>
             <a:r>
-              <a:rPr sz="1600" b="1" i="0">
+              <a:rPr sz="2000" b="1" i="0">
                 <a:solidFill>
                   <a:srgbClr val="333333"/>
                 </a:solidFill>
@@ -10910,7 +10910,7 @@
               <a:t>25</a:t>
             </a:r>
             <a:r>
-              <a:rPr sz="1600" b="0" i="0">
+              <a:rPr sz="2000" b="0" i="0">
                 <a:solidFill>
                   <a:srgbClr val="333333"/>
                 </a:solidFill>
@@ -10919,7 +10919,7 @@
               <a:t>, de </a:t>
             </a:r>
             <a:r>
-              <a:rPr sz="1600" b="1" i="0">
+              <a:rPr sz="2000" b="1" i="0">
                 <a:solidFill>
                   <a:srgbClr val="333333"/>
                 </a:solidFill>
@@ -10928,7 +10928,7 @@
               <a:t>5</a:t>
             </a:r>
             <a:r>
-              <a:rPr sz="1600" b="0" i="0">
+              <a:rPr sz="2000" b="0" i="0">
                 <a:solidFill>
                   <a:srgbClr val="333333"/>
                 </a:solidFill>
@@ -10937,7 +10937,7 @@
               <a:t>; con </a:t>
             </a:r>
             <a:r>
-              <a:rPr sz="1600" b="1" i="0">
+              <a:rPr sz="2000" b="1" i="0">
                 <a:solidFill>
                   <a:srgbClr val="333333"/>
                 </a:solidFill>
@@ -10946,7 +10946,7 @@
               <a:t>30</a:t>
             </a:r>
             <a:r>
-              <a:rPr sz="1600" b="0" i="0">
+              <a:rPr sz="2000" b="0" i="0">
                 <a:solidFill>
                   <a:srgbClr val="333333"/>
                 </a:solidFill>
@@ -10955,7 +10955,7 @@
               <a:t>, de </a:t>
             </a:r>
             <a:r>
-              <a:rPr sz="1600" b="1" i="0">
+              <a:rPr sz="2000" b="1" i="0">
                 <a:solidFill>
                   <a:srgbClr val="333333"/>
                 </a:solidFill>
@@ -10964,7 +10964,7 @@
               <a:t>6</a:t>
             </a:r>
             <a:r>
-              <a:rPr sz="1600" b="0" i="0">
+              <a:rPr sz="2000" b="0" i="0">
                 <a:solidFill>
                   <a:srgbClr val="333333"/>
                 </a:solidFill>
@@ -10973,7 +10973,7 @@
               <a:t>; con </a:t>
             </a:r>
             <a:r>
-              <a:rPr sz="1600" b="1" i="0">
+              <a:rPr sz="2000" b="1" i="0">
                 <a:solidFill>
                   <a:srgbClr val="333333"/>
                 </a:solidFill>
@@ -10982,7 +10982,7 @@
               <a:t>35</a:t>
             </a:r>
             <a:r>
-              <a:rPr sz="1600" b="0" i="0">
+              <a:rPr sz="2000" b="0" i="0">
                 <a:solidFill>
                   <a:srgbClr val="333333"/>
                 </a:solidFill>
@@ -10991,7 +10991,7 @@
               <a:t>, de </a:t>
             </a:r>
             <a:r>
-              <a:rPr sz="1600" b="1" i="0">
+              <a:rPr sz="2000" b="1" i="0">
                 <a:solidFill>
                   <a:srgbClr val="333333"/>
                 </a:solidFill>
@@ -11000,7 +11000,7 @@
               <a:t>7</a:t>
             </a:r>
             <a:r>
-              <a:rPr sz="1600" b="0" i="0">
+              <a:rPr sz="2000" b="0" i="0">
                 <a:solidFill>
                   <a:srgbClr val="333333"/>
                 </a:solidFill>
@@ -11016,7 +11016,7 @@
               </a:spcAft>
             </a:pPr>
             <a:r>
-              <a:rPr sz="1600" b="0" i="0">
+              <a:rPr sz="2000" b="0" i="0">
                 <a:solidFill>
                   <a:srgbClr val="333333"/>
                 </a:solidFill>
@@ -11025,7 +11025,7 @@
               <a:t>–   </a:t>
             </a:r>
             <a:r>
-              <a:rPr sz="1600" b="1" i="0">
+              <a:rPr sz="2000" b="1" i="0">
                 <a:solidFill>
                   <a:srgbClr val="333333"/>
                 </a:solidFill>
@@ -11034,7 +11034,7 @@
               <a:t>Los equipos son estables todo el semestre</a:t>
             </a:r>
             <a:r>
-              <a:rPr sz="1600" b="0" i="0">
+              <a:rPr sz="2000" b="0" i="0">
                 <a:solidFill>
                   <a:srgbClr val="333333"/>
                 </a:solidFill>
@@ -11043,7 +11043,7 @@
               <a:t> (el proyecto es del equipo), pero el </a:t>
             </a:r>
             <a:r>
-              <a:rPr sz="1600" b="1" i="0">
+              <a:rPr sz="2000" b="1" i="0">
                 <a:solidFill>
                   <a:srgbClr val="333333"/>
                 </a:solidFill>
@@ -11052,7 +11052,7 @@
               <a:t>vocero rota</a:t>
             </a:r>
             <a:r>
-              <a:rPr sz="1600" b="0" i="0">
+              <a:rPr sz="2000" b="0" i="0">
                 <a:solidFill>
                   <a:srgbClr val="333333"/>
                 </a:solidFill>
@@ -11068,7 +11068,7 @@
               </a:spcAft>
             </a:pPr>
             <a:r>
-              <a:rPr sz="1600" b="0" i="0">
+              <a:rPr sz="2000" b="0" i="0">
                 <a:solidFill>
                   <a:srgbClr val="333333"/>
                 </a:solidFill>
@@ -11077,7 +11077,7 @@
               <a:t>–   </a:t>
             </a:r>
             <a:r>
-              <a:rPr sz="1600" b="1" i="0">
+              <a:rPr sz="2000" b="1" i="0">
                 <a:solidFill>
                   <a:srgbClr val="333333"/>
                 </a:solidFill>
@@ -11086,7 +11086,7 @@
               <a:t>Todos los equipos exponen todas las sesiones.</a:t>
             </a:r>
             <a:r>
-              <a:rPr sz="1600" b="0" i="0">
+              <a:rPr sz="2000" b="0" i="0">
                 <a:solidFill>
                   <a:srgbClr val="333333"/>
                 </a:solidFill>

--- a/Introduccion a la Ingenieria/Clases/Presentacion del Curso - Introduccion a la Ingenieria - LB141F.pptx
+++ b/Introduccion a la Ingenieria/Clases/Presentacion del Curso - Introduccion a la Ingenieria - LB141F.pptx
@@ -12843,7 +12843,7 @@
                 </a:solidFill>
                 <a:latin typeface="Calibri"/>
               </a:rPr>
-              <a:t>Diagnóstico de la sesión 1, comprobaciones rápidas de lectura y las dos evaluaciones de corte escritas (sesiones 6 y 11)</a:t>
+              <a:t>Entrega del taller de equipo de las 16 sesiones (5 preguntas, 100 puntos), el diagnóstico de la sesión 1 y las dos evaluaciones de corte escritas (sesiones 6 y 11)</a:t>
             </a:r>
           </a:p>
         </p:txBody>

--- a/Introduccion a la Ingenieria/Clases/Presentacion del Curso - Introduccion a la Ingenieria - LB141F.pptx
+++ b/Introduccion a la Ingenieria/Clases/Presentacion del Curso - Introduccion a la Ingenieria - LB141F.pptx
@@ -5163,7 +5163,7 @@
                 </a:solidFill>
                 <a:latin typeface="Calibri"/>
               </a:rPr>
-              <a:t>01/09 – 06/10/2026 · sesiones 1-6</a:t>
+              <a:t>08/09 – 13/10/2026 · sesiones 1-6</a:t>
             </a:r>
           </a:p>
         </p:txBody>
@@ -5434,7 +5434,7 @@
                 </a:solidFill>
                 <a:latin typeface="Calibri"/>
               </a:rPr>
-              <a:t>13/10 – 10/11/2026 · sesiones 7-11</a:t>
+              <a:t>20/10 – 17/11/2026 · sesiones 7-11</a:t>
             </a:r>
           </a:p>
         </p:txBody>
@@ -5705,7 +5705,7 @@
                 </a:solidFill>
                 <a:latin typeface="Calibri"/>
               </a:rPr>
-              <a:t>17/11 – 22/12/2026 · sesiones 12-16</a:t>
+              <a:t>24/11 – 29/12/2026 · sesiones 12-16</a:t>
             </a:r>
           </a:p>
         </p:txBody>
@@ -5819,7 +5819,7 @@
                 </a:solidFill>
                 <a:latin typeface="Calibri"/>
               </a:rPr>
-              <a:t>Cada corte cierra en la sesión 6 / 11 / 16 (06/10/2026 / 10/11/2026 / 22/12/2026). La evaluación es </a:t>
+              <a:t>Cada corte cierra en la sesión 6 / 11 / 16 (13/10/2026 / 17/11/2026 / 29/12/2026). La evaluación es </a:t>
             </a:r>
             <a:r>
               <a:rPr sz="1050" b="1" i="1">
@@ -6069,7 +6069,7 @@
                 </a:solidFill>
                 <a:latin typeface="Calibri"/>
               </a:rPr>
-              <a:t> de 90 min · Martes · 01/09/2026 a 22/12/2026 · incluye </a:t>
+              <a:t> de 90 min · Martes · 08/09/2026 a 29/12/2026 · incluye </a:t>
             </a:r>
             <a:r>
               <a:rPr sz="1300" b="1" i="0">
@@ -6144,7 +6144,7 @@
                 </a:solidFill>
                 <a:latin typeface="Calibri"/>
               </a:rPr>
-              <a:t> Presentación del curso: encuadre, evaluación, equipos y plataformas (01/09) · mismo bloque de la Sesión 1</a:t>
+              <a:t> Presentación del curso: encuadre, evaluación, equipos y plataformas (08/09) · mismo bloque de la Sesión 1</a:t>
             </a:r>
           </a:p>
           <a:p>
@@ -6178,7 +6178,7 @@
                 </a:solidFill>
                 <a:latin typeface="Calibri"/>
               </a:rPr>
-              <a:t> Presentación del curso y diagnóstico inicial (01/09)</a:t>
+              <a:t> Presentación del curso y diagnóstico inicial (08/09)</a:t>
             </a:r>
           </a:p>
           <a:p>
@@ -6212,7 +6212,7 @@
                 </a:solidFill>
                 <a:latin typeface="Calibri"/>
               </a:rPr>
-              <a:t> Historia y evolución de la Ingeniería (08/09)</a:t>
+              <a:t> Historia y evolución de la Ingeniería (15/09)</a:t>
             </a:r>
           </a:p>
           <a:p>
@@ -6246,7 +6246,7 @@
                 </a:solidFill>
                 <a:latin typeface="Calibri"/>
               </a:rPr>
-              <a:t> Fundamentos básicos de la Ingeniería de Sistemas (15/09)</a:t>
+              <a:t> Fundamentos básicos de la Ingeniería de Sistemas (22/09)</a:t>
             </a:r>
           </a:p>
           <a:p>
@@ -6280,7 +6280,7 @@
                 </a:solidFill>
                 <a:latin typeface="Calibri"/>
               </a:rPr>
-              <a:t> Principios éticos en la Ingeniería (22/09)</a:t>
+              <a:t> Principios éticos en la Ingeniería (29/09)</a:t>
             </a:r>
           </a:p>
           <a:p>
@@ -6314,7 +6314,7 @@
                 </a:solidFill>
                 <a:latin typeface="Calibri"/>
               </a:rPr>
-              <a:t> El rol del ingeniero en el contexto ambiental (29/09)</a:t>
+              <a:t> El rol del ingeniero en el contexto ambiental (06/10)</a:t>
             </a:r>
           </a:p>
           <a:p>
@@ -6348,7 +6348,7 @@
                 </a:solidFill>
                 <a:latin typeface="Calibri"/>
               </a:rPr>
-              <a:t> Análisis de problemas tecnológicos del entorno (06/10) · cierra Corte 1 (30%)</a:t>
+              <a:t> Análisis de problemas tecnológicos del entorno (13/10) · cierra Corte 1 (30%)</a:t>
             </a:r>
           </a:p>
           <a:p>
@@ -6382,7 +6382,7 @@
                 </a:solidFill>
                 <a:latin typeface="Calibri"/>
               </a:rPr>
-              <a:t> Ciclo de vida de los proyectos de ingeniería (13/10)</a:t>
+              <a:t> Ciclo de vida de los proyectos de ingeniería (20/10)</a:t>
             </a:r>
           </a:p>
           <a:p>
@@ -6416,7 +6416,7 @@
                 </a:solidFill>
                 <a:latin typeface="Calibri"/>
               </a:rPr>
-              <a:t> Taller de aplicación del ciclo de vida (20/10)</a:t>
+              <a:t> Taller de aplicación del ciclo de vida (27/10)</a:t>
             </a:r>
           </a:p>
         </p:txBody>
@@ -6473,7 +6473,7 @@
                 </a:solidFill>
                 <a:latin typeface="Calibri"/>
               </a:rPr>
-              <a:t> Estrategias de innovación en Ingeniería (27/10)</a:t>
+              <a:t> Estrategias de innovación en Ingeniería (03/11)</a:t>
             </a:r>
           </a:p>
           <a:p>
@@ -6507,7 +6507,7 @@
                 </a:solidFill>
                 <a:latin typeface="Calibri"/>
               </a:rPr>
-              <a:t> Herramientas digitales aplicadas a la Ingeniería (03/11)</a:t>
+              <a:t> Herramientas digitales aplicadas a la Ingeniería (10/11)</a:t>
             </a:r>
           </a:p>
           <a:p>
@@ -6541,7 +6541,7 @@
                 </a:solidFill>
                 <a:latin typeface="Calibri"/>
               </a:rPr>
-              <a:t> Taller de prototipado inicial con IA (10/11) · cierra Corte 2 (30%)</a:t>
+              <a:t> Taller de prototipado inicial con IA (17/11) · cierra Corte 2 (30%)</a:t>
             </a:r>
           </a:p>
           <a:p>
@@ -6575,7 +6575,7 @@
                 </a:solidFill>
                 <a:latin typeface="Calibri"/>
               </a:rPr>
-              <a:t> Presentación de avances de proyectos (17/11)</a:t>
+              <a:t> Presentación de avances de proyectos (24/11)</a:t>
             </a:r>
           </a:p>
           <a:p>
@@ -6609,7 +6609,7 @@
                 </a:solidFill>
                 <a:latin typeface="Calibri"/>
               </a:rPr>
-              <a:t> Evaluación de impacto social y ambiental (24/11)</a:t>
+              <a:t> Evaluación de impacto social y ambiental (01/12)</a:t>
             </a:r>
           </a:p>
           <a:p>
@@ -6634,7 +6634,7 @@
                 </a:solidFill>
                 <a:latin typeface="Calibri"/>
               </a:rPr>
-              <a:t>Sesión 14 –</a:t>
+              <a:t>Semana autónoma –</a:t>
             </a:r>
             <a:r>
               <a:rPr sz="1100" b="0" i="0">
@@ -6643,7 +6643,7 @@
                 </a:solidFill>
                 <a:latin typeface="Calibri"/>
               </a:rPr>
-              <a:t> Preparación de la presentación final (01/12)</a:t>
+              <a:t> Ensayo general de la exposición final (trabajo de equipo, sin docente) (08/12) · festivo: Inmaculada Concepción · no se pierde, se trabaja</a:t>
             </a:r>
           </a:p>
           <a:p>
@@ -6668,7 +6668,7 @@
                 </a:solidFill>
                 <a:latin typeface="Calibri"/>
               </a:rPr>
-              <a:t>Semana autónoma –</a:t>
+              <a:t>Sesión 14 –</a:t>
             </a:r>
             <a:r>
               <a:rPr sz="1100" b="0" i="0">
@@ -6677,7 +6677,7 @@
                 </a:solidFill>
                 <a:latin typeface="Calibri"/>
               </a:rPr>
-              <a:t> Ensayo general de la exposición final (trabajo de equipo, sin docente) (08/12) · festivo: Inmaculada Concepcion · no se pierde, se trabaja</a:t>
+              <a:t> Preparación de la presentación final (15/12)</a:t>
             </a:r>
           </a:p>
           <a:p>
@@ -6711,7 +6711,7 @@
                 </a:solidFill>
                 <a:latin typeface="Calibri"/>
               </a:rPr>
-              <a:t> Exposición final de proyectos (15/12)</a:t>
+              <a:t> Exposición final de proyectos (22/12)</a:t>
             </a:r>
           </a:p>
           <a:p>
@@ -6745,7 +6745,7 @@
                 </a:solidFill>
                 <a:latin typeface="Calibri"/>
               </a:rPr>
-              <a:t> Socialización y evaluación final del curso (22/12) · cierra Corte 3 (40%)</a:t>
+              <a:t> Socialización y evaluación final del curso (29/12) · cierra Corte 3 (40%)</a:t>
             </a:r>
           </a:p>
         </p:txBody>

--- a/Introduccion a la Ingenieria/Clases/Presentacion del Curso - Introduccion a la Ingenieria - LB141F.pptx
+++ b/Introduccion a la Ingenieria/Clases/Presentacion del Curso - Introduccion a la Ingenieria - LB141F.pptx
@@ -3747,7 +3747,7 @@
                 </a:solidFill>
                 <a:latin typeface="Calibri"/>
               </a:rPr>
-              <a:t>Aplican a las 16 sesiones · se recuerdan solo hoy</a:t>
+              <a:t>Aplican a las 11 sesiones · se recuerdan solo hoy</a:t>
             </a:r>
           </a:p>
         </p:txBody>
@@ -5163,7 +5163,7 @@
                 </a:solidFill>
                 <a:latin typeface="Calibri"/>
               </a:rPr>
-              <a:t>08/09 – 13/10/2026 · sesiones 1-6</a:t>
+              <a:t>08/09 – 29/09/2026 · sesiones 1-4</a:t>
             </a:r>
           </a:p>
         </p:txBody>
@@ -5211,7 +5211,7 @@
                 </a:solidFill>
                 <a:latin typeface="Calibri"/>
               </a:rPr>
-              <a:t>Evaluación de corte (sesión 6) · 10%</a:t>
+              <a:t>Evaluación de corte (sesión 4) · 10%</a:t>
             </a:r>
           </a:p>
           <a:p>
@@ -5434,7 +5434,7 @@
                 </a:solidFill>
                 <a:latin typeface="Calibri"/>
               </a:rPr>
-              <a:t>20/10 – 17/11/2026 · sesiones 7-11</a:t>
+              <a:t>06/10 – 20/10/2026 · sesiones 5-7</a:t>
             </a:r>
           </a:p>
         </p:txBody>
@@ -5482,7 +5482,7 @@
                 </a:solidFill>
                 <a:latin typeface="Calibri"/>
               </a:rPr>
-              <a:t>Evaluación de corte (sesión 11) · 10%</a:t>
+              <a:t>Evaluación de corte (sesión 7) · 10%</a:t>
             </a:r>
           </a:p>
           <a:p>
@@ -5705,7 +5705,7 @@
                 </a:solidFill>
                 <a:latin typeface="Calibri"/>
               </a:rPr>
-              <a:t>24/11 – 29/12/2026 · sesiones 12-16</a:t>
+              <a:t>27/10 – 17/11/2026 · sesiones 8-11</a:t>
             </a:r>
           </a:p>
         </p:txBody>
@@ -5753,7 +5753,7 @@
                 </a:solidFill>
                 <a:latin typeface="Calibri"/>
               </a:rPr>
-              <a:t>Exposición final del proyecto (sesión 15) · 15%</a:t>
+              <a:t>Exposición final del proyecto — Clase 15 (sesión 11) · 15%</a:t>
             </a:r>
           </a:p>
           <a:p>
@@ -5769,7 +5769,7 @@
                 </a:solidFill>
                 <a:latin typeface="Calibri"/>
               </a:rPr>
-              <a:t>–   Informe final del proyecto (sesión 16) · 20%</a:t>
+              <a:t>–   Informe final del proyecto — Clase 16 (sesión 11) · 20%</a:t>
             </a:r>
           </a:p>
           <a:p>
@@ -5819,7 +5819,7 @@
                 </a:solidFill>
                 <a:latin typeface="Calibri"/>
               </a:rPr>
-              <a:t>Cada corte cierra en la sesión 6 / 11 / 16 (13/10/2026 / 17/11/2026 / 29/12/2026). La evaluación es </a:t>
+              <a:t>Cada corte cierra en la sesión 4 / 7 / 11 (29/09/2026 / 20/10/2026 / 17/11/2026). La evaluación es </a:t>
             </a:r>
             <a:r>
               <a:rPr sz="1050" b="1" i="1">
@@ -6060,7 +6060,7 @@
                 </a:solidFill>
                 <a:latin typeface="Calibri"/>
               </a:rPr>
-              <a:t>16 sesiones</a:t>
+              <a:t>11 sesiones</a:t>
             </a:r>
             <a:r>
               <a:rPr sz="1300" b="0" i="0">
@@ -6069,25 +6069,7 @@
                 </a:solidFill>
                 <a:latin typeface="Calibri"/>
               </a:rPr>
-              <a:t> de 90 min · Martes · 08/09/2026 a 29/12/2026 · incluye </a:t>
-            </a:r>
-            <a:r>
-              <a:rPr sz="1300" b="1" i="0">
-                <a:solidFill>
-                  <a:srgbClr val="666666"/>
-                </a:solidFill>
-                <a:latin typeface="Calibri"/>
-              </a:rPr>
-              <a:t>1 semana autónoma</a:t>
-            </a:r>
-            <a:r>
-              <a:rPr sz="1300" b="0" i="0">
-                <a:solidFill>
-                  <a:srgbClr val="666666"/>
-                </a:solidFill>
-                <a:latin typeface="Calibri"/>
-              </a:rPr>
-              <a:t> por el festivo del 08/12</a:t>
+              <a:t> de 90 min · Martes · 08/09/2026 a 17/11/2026</a:t>
             </a:r>
           </a:p>
         </p:txBody>
@@ -6116,11 +6098,11 @@
           <a:p>
             <a:pPr>
               <a:spcAft>
-                <a:spcPts val="600"/>
+                <a:spcPts val="900"/>
               </a:spcAft>
             </a:pPr>
             <a:r>
-              <a:rPr sz="1100" b="0" i="0">
+              <a:rPr sz="1200" b="0" i="0">
                 <a:solidFill>
                   <a:srgbClr val="333333"/>
                 </a:solidFill>
@@ -6129,7 +6111,7 @@
               <a:t>–   </a:t>
             </a:r>
             <a:r>
-              <a:rPr sz="1100" b="1" i="0">
+              <a:rPr sz="1200" b="1" i="0">
                 <a:solidFill>
                   <a:srgbClr val="333333"/>
                 </a:solidFill>
@@ -6138,7 +6120,7 @@
               <a:t>Sesión 0 –</a:t>
             </a:r>
             <a:r>
-              <a:rPr sz="1100" b="0" i="0">
+              <a:rPr sz="1200" b="0" i="0">
                 <a:solidFill>
                   <a:srgbClr val="333333"/>
                 </a:solidFill>
@@ -6150,11 +6132,11 @@
           <a:p>
             <a:pPr>
               <a:spcAft>
-                <a:spcPts val="600"/>
+                <a:spcPts val="900"/>
               </a:spcAft>
             </a:pPr>
             <a:r>
-              <a:rPr sz="1100" b="0" i="0">
+              <a:rPr sz="1200" b="0" i="0">
                 <a:solidFill>
                   <a:srgbClr val="333333"/>
                 </a:solidFill>
@@ -6163,7 +6145,7 @@
               <a:t>–   </a:t>
             </a:r>
             <a:r>
-              <a:rPr sz="1100" b="1" i="0">
+              <a:rPr sz="1200" b="1" i="0">
                 <a:solidFill>
                   <a:srgbClr val="333333"/>
                 </a:solidFill>
@@ -6172,7 +6154,7 @@
               <a:t>Sesión 1 –</a:t>
             </a:r>
             <a:r>
-              <a:rPr sz="1100" b="0" i="0">
+              <a:rPr sz="1200" b="0" i="0">
                 <a:solidFill>
                   <a:srgbClr val="333333"/>
                 </a:solidFill>
@@ -6184,11 +6166,11 @@
           <a:p>
             <a:pPr>
               <a:spcAft>
-                <a:spcPts val="600"/>
+                <a:spcPts val="900"/>
               </a:spcAft>
             </a:pPr>
             <a:r>
-              <a:rPr sz="1100" b="0" i="0">
+              <a:rPr sz="1200" b="0" i="0">
                 <a:solidFill>
                   <a:srgbClr val="333333"/>
                 </a:solidFill>
@@ -6197,7 +6179,7 @@
               <a:t>–   </a:t>
             </a:r>
             <a:r>
-              <a:rPr sz="1100" b="1" i="0">
+              <a:rPr sz="1200" b="1" i="0">
                 <a:solidFill>
                   <a:srgbClr val="333333"/>
                 </a:solidFill>
@@ -6206,23 +6188,23 @@
               <a:t>Sesión 2 –</a:t>
             </a:r>
             <a:r>
-              <a:rPr sz="1100" b="0" i="0">
-                <a:solidFill>
-                  <a:srgbClr val="333333"/>
-                </a:solidFill>
-                <a:latin typeface="Calibri"/>
-              </a:rPr>
-              <a:t> Historia y evolución de la Ingeniería (15/09)</a:t>
+              <a:rPr sz="1200" b="0" i="0">
+                <a:solidFill>
+                  <a:srgbClr val="333333"/>
+                </a:solidFill>
+                <a:latin typeface="Calibri"/>
+              </a:rPr>
+              <a:t> Historia y evolución de la Ingeniería + Fundamentos básicos de la Ingeniería de Sistemas (15/09) · sesión doble</a:t>
             </a:r>
           </a:p>
           <a:p>
             <a:pPr>
               <a:spcAft>
-                <a:spcPts val="600"/>
+                <a:spcPts val="900"/>
               </a:spcAft>
             </a:pPr>
             <a:r>
-              <a:rPr sz="1100" b="0" i="0">
+              <a:rPr sz="1200" b="0" i="0">
                 <a:solidFill>
                   <a:srgbClr val="333333"/>
                 </a:solidFill>
@@ -6231,7 +6213,7 @@
               <a:t>–   </a:t>
             </a:r>
             <a:r>
-              <a:rPr sz="1100" b="1" i="0">
+              <a:rPr sz="1200" b="1" i="0">
                 <a:solidFill>
                   <a:srgbClr val="333333"/>
                 </a:solidFill>
@@ -6240,23 +6222,23 @@
               <a:t>Sesión 3 –</a:t>
             </a:r>
             <a:r>
-              <a:rPr sz="1100" b="0" i="0">
-                <a:solidFill>
-                  <a:srgbClr val="333333"/>
-                </a:solidFill>
-                <a:latin typeface="Calibri"/>
-              </a:rPr>
-              <a:t> Fundamentos básicos de la Ingeniería de Sistemas (22/09)</a:t>
+              <a:rPr sz="1200" b="0" i="0">
+                <a:solidFill>
+                  <a:srgbClr val="333333"/>
+                </a:solidFill>
+                <a:latin typeface="Calibri"/>
+              </a:rPr>
+              <a:t> Principios éticos en la Ingeniería + El rol del ingeniero en el contexto ambiental (22/09) · sesión doble</a:t>
             </a:r>
           </a:p>
           <a:p>
             <a:pPr>
               <a:spcAft>
-                <a:spcPts val="600"/>
+                <a:spcPts val="900"/>
               </a:spcAft>
             </a:pPr>
             <a:r>
-              <a:rPr sz="1100" b="0" i="0">
+              <a:rPr sz="1200" b="0" i="0">
                 <a:solidFill>
                   <a:srgbClr val="333333"/>
                 </a:solidFill>
@@ -6265,7 +6247,7 @@
               <a:t>–   </a:t>
             </a:r>
             <a:r>
-              <a:rPr sz="1100" b="1" i="0">
+              <a:rPr sz="1200" b="1" i="0">
                 <a:solidFill>
                   <a:srgbClr val="333333"/>
                 </a:solidFill>
@@ -6274,23 +6256,23 @@
               <a:t>Sesión 4 –</a:t>
             </a:r>
             <a:r>
-              <a:rPr sz="1100" b="0" i="0">
-                <a:solidFill>
-                  <a:srgbClr val="333333"/>
-                </a:solidFill>
-                <a:latin typeface="Calibri"/>
-              </a:rPr>
-              <a:t> Principios éticos en la Ingeniería (29/09)</a:t>
+              <a:rPr sz="1200" b="0" i="0">
+                <a:solidFill>
+                  <a:srgbClr val="333333"/>
+                </a:solidFill>
+                <a:latin typeface="Calibri"/>
+              </a:rPr>
+              <a:t> Análisis de problemas tecnológicos del entorno (29/09) · cierra Corte 1 (30%)</a:t>
             </a:r>
           </a:p>
           <a:p>
             <a:pPr>
               <a:spcAft>
-                <a:spcPts val="600"/>
+                <a:spcPts val="900"/>
               </a:spcAft>
             </a:pPr>
             <a:r>
-              <a:rPr sz="1100" b="0" i="0">
+              <a:rPr sz="1200" b="0" i="0">
                 <a:solidFill>
                   <a:srgbClr val="333333"/>
                 </a:solidFill>
@@ -6299,7 +6281,7 @@
               <a:t>–   </a:t>
             </a:r>
             <a:r>
-              <a:rPr sz="1100" b="1" i="0">
+              <a:rPr sz="1200" b="1" i="0">
                 <a:solidFill>
                   <a:srgbClr val="333333"/>
                 </a:solidFill>
@@ -6308,115 +6290,13 @@
               <a:t>Sesión 5 –</a:t>
             </a:r>
             <a:r>
-              <a:rPr sz="1100" b="0" i="0">
-                <a:solidFill>
-                  <a:srgbClr val="333333"/>
-                </a:solidFill>
-                <a:latin typeface="Calibri"/>
-              </a:rPr>
-              <a:t> El rol del ingeniero en el contexto ambiental (06/10)</a:t>
-            </a:r>
-          </a:p>
-          <a:p>
-            <a:pPr>
-              <a:spcAft>
-                <a:spcPts val="600"/>
-              </a:spcAft>
-            </a:pPr>
-            <a:r>
-              <a:rPr sz="1100" b="0" i="0">
-                <a:solidFill>
-                  <a:srgbClr val="333333"/>
-                </a:solidFill>
-                <a:latin typeface="Calibri"/>
-              </a:rPr>
-              <a:t>–   </a:t>
-            </a:r>
-            <a:r>
-              <a:rPr sz="1100" b="1" i="0">
-                <a:solidFill>
-                  <a:srgbClr val="333333"/>
-                </a:solidFill>
-                <a:latin typeface="Calibri"/>
-              </a:rPr>
-              <a:t>Sesión 6 –</a:t>
-            </a:r>
-            <a:r>
-              <a:rPr sz="1100" b="0" i="0">
-                <a:solidFill>
-                  <a:srgbClr val="333333"/>
-                </a:solidFill>
-                <a:latin typeface="Calibri"/>
-              </a:rPr>
-              <a:t> Análisis de problemas tecnológicos del entorno (13/10) · cierra Corte 1 (30%)</a:t>
-            </a:r>
-          </a:p>
-          <a:p>
-            <a:pPr>
-              <a:spcAft>
-                <a:spcPts val="600"/>
-              </a:spcAft>
-            </a:pPr>
-            <a:r>
-              <a:rPr sz="1100" b="0" i="0">
-                <a:solidFill>
-                  <a:srgbClr val="333333"/>
-                </a:solidFill>
-                <a:latin typeface="Calibri"/>
-              </a:rPr>
-              <a:t>–   </a:t>
-            </a:r>
-            <a:r>
-              <a:rPr sz="1100" b="1" i="0">
-                <a:solidFill>
-                  <a:srgbClr val="333333"/>
-                </a:solidFill>
-                <a:latin typeface="Calibri"/>
-              </a:rPr>
-              <a:t>Sesión 7 –</a:t>
-            </a:r>
-            <a:r>
-              <a:rPr sz="1100" b="0" i="0">
-                <a:solidFill>
-                  <a:srgbClr val="333333"/>
-                </a:solidFill>
-                <a:latin typeface="Calibri"/>
-              </a:rPr>
-              <a:t> Ciclo de vida de los proyectos de ingeniería (20/10)</a:t>
-            </a:r>
-          </a:p>
-          <a:p>
-            <a:pPr>
-              <a:spcAft>
-                <a:spcPts val="600"/>
-              </a:spcAft>
-            </a:pPr>
-            <a:r>
-              <a:rPr sz="1100" b="0" i="0">
-                <a:solidFill>
-                  <a:srgbClr val="333333"/>
-                </a:solidFill>
-                <a:latin typeface="Calibri"/>
-              </a:rPr>
-              <a:t>–   </a:t>
-            </a:r>
-            <a:r>
-              <a:rPr sz="1100" b="1" i="0">
-                <a:solidFill>
-                  <a:srgbClr val="333333"/>
-                </a:solidFill>
-                <a:latin typeface="Calibri"/>
-              </a:rPr>
-              <a:t>Sesión 8 –</a:t>
-            </a:r>
-            <a:r>
-              <a:rPr sz="1100" b="0" i="0">
-                <a:solidFill>
-                  <a:srgbClr val="333333"/>
-                </a:solidFill>
-                <a:latin typeface="Calibri"/>
-              </a:rPr>
-              <a:t> Taller de aplicación del ciclo de vida (27/10)</a:t>
+              <a:rPr sz="1200" b="0" i="0">
+                <a:solidFill>
+                  <a:srgbClr val="333333"/>
+                </a:solidFill>
+                <a:latin typeface="Calibri"/>
+              </a:rPr>
+              <a:t> Ciclo de vida de los proyectos de ingeniería + Taller de aplicación del ciclo de vida (06/10) · sesión doble</a:t>
             </a:r>
           </a:p>
         </p:txBody>
@@ -6445,11 +6325,11 @@
           <a:p>
             <a:pPr>
               <a:spcAft>
-                <a:spcPts val="600"/>
+                <a:spcPts val="900"/>
               </a:spcAft>
             </a:pPr>
             <a:r>
-              <a:rPr sz="1100" b="0" i="0">
+              <a:rPr sz="1200" b="0" i="0">
                 <a:solidFill>
                   <a:srgbClr val="333333"/>
                 </a:solidFill>
@@ -6458,32 +6338,32 @@
               <a:t>–   </a:t>
             </a:r>
             <a:r>
-              <a:rPr sz="1100" b="1" i="0">
-                <a:solidFill>
-                  <a:srgbClr val="333333"/>
-                </a:solidFill>
-                <a:latin typeface="Calibri"/>
-              </a:rPr>
-              <a:t>Sesión 9 –</a:t>
-            </a:r>
-            <a:r>
-              <a:rPr sz="1100" b="0" i="0">
-                <a:solidFill>
-                  <a:srgbClr val="333333"/>
-                </a:solidFill>
-                <a:latin typeface="Calibri"/>
-              </a:rPr>
-              <a:t> Estrategias de innovación en Ingeniería (03/11)</a:t>
+              <a:rPr sz="1200" b="1" i="0">
+                <a:solidFill>
+                  <a:srgbClr val="333333"/>
+                </a:solidFill>
+                <a:latin typeface="Calibri"/>
+              </a:rPr>
+              <a:t>Sesión 6 –</a:t>
+            </a:r>
+            <a:r>
+              <a:rPr sz="1200" b="0" i="0">
+                <a:solidFill>
+                  <a:srgbClr val="333333"/>
+                </a:solidFill>
+                <a:latin typeface="Calibri"/>
+              </a:rPr>
+              <a:t> Estrategias de innovación en Ingeniería + Herramientas digitales aplicadas a la Ingeniería (13/10) · sesión doble</a:t>
             </a:r>
           </a:p>
           <a:p>
             <a:pPr>
               <a:spcAft>
-                <a:spcPts val="600"/>
+                <a:spcPts val="900"/>
               </a:spcAft>
             </a:pPr>
             <a:r>
-              <a:rPr sz="1100" b="0" i="0">
+              <a:rPr sz="1200" b="0" i="0">
                 <a:solidFill>
                   <a:srgbClr val="333333"/>
                 </a:solidFill>
@@ -6492,32 +6372,32 @@
               <a:t>–   </a:t>
             </a:r>
             <a:r>
-              <a:rPr sz="1100" b="1" i="0">
-                <a:solidFill>
-                  <a:srgbClr val="333333"/>
-                </a:solidFill>
-                <a:latin typeface="Calibri"/>
-              </a:rPr>
-              <a:t>Sesión 10 –</a:t>
-            </a:r>
-            <a:r>
-              <a:rPr sz="1100" b="0" i="0">
-                <a:solidFill>
-                  <a:srgbClr val="333333"/>
-                </a:solidFill>
-                <a:latin typeface="Calibri"/>
-              </a:rPr>
-              <a:t> Herramientas digitales aplicadas a la Ingeniería (10/11)</a:t>
+              <a:rPr sz="1200" b="1" i="0">
+                <a:solidFill>
+                  <a:srgbClr val="333333"/>
+                </a:solidFill>
+                <a:latin typeface="Calibri"/>
+              </a:rPr>
+              <a:t>Sesión 7 –</a:t>
+            </a:r>
+            <a:r>
+              <a:rPr sz="1200" b="0" i="0">
+                <a:solidFill>
+                  <a:srgbClr val="333333"/>
+                </a:solidFill>
+                <a:latin typeface="Calibri"/>
+              </a:rPr>
+              <a:t> Taller de prototipado inicial con IA (20/10) · cierra Corte 2 (30%)</a:t>
             </a:r>
           </a:p>
           <a:p>
             <a:pPr>
               <a:spcAft>
-                <a:spcPts val="600"/>
+                <a:spcPts val="900"/>
               </a:spcAft>
             </a:pPr>
             <a:r>
-              <a:rPr sz="1100" b="0" i="0">
+              <a:rPr sz="1200" b="0" i="0">
                 <a:solidFill>
                   <a:srgbClr val="333333"/>
                 </a:solidFill>
@@ -6526,32 +6406,32 @@
               <a:t>–   </a:t>
             </a:r>
             <a:r>
-              <a:rPr sz="1100" b="1" i="0">
-                <a:solidFill>
-                  <a:srgbClr val="333333"/>
-                </a:solidFill>
-                <a:latin typeface="Calibri"/>
-              </a:rPr>
-              <a:t>Sesión 11 –</a:t>
-            </a:r>
-            <a:r>
-              <a:rPr sz="1100" b="0" i="0">
-                <a:solidFill>
-                  <a:srgbClr val="333333"/>
-                </a:solidFill>
-                <a:latin typeface="Calibri"/>
-              </a:rPr>
-              <a:t> Taller de prototipado inicial con IA (17/11) · cierra Corte 2 (30%)</a:t>
+              <a:rPr sz="1200" b="1" i="0">
+                <a:solidFill>
+                  <a:srgbClr val="333333"/>
+                </a:solidFill>
+                <a:latin typeface="Calibri"/>
+              </a:rPr>
+              <a:t>Sesión 8 –</a:t>
+            </a:r>
+            <a:r>
+              <a:rPr sz="1200" b="0" i="0">
+                <a:solidFill>
+                  <a:srgbClr val="333333"/>
+                </a:solidFill>
+                <a:latin typeface="Calibri"/>
+              </a:rPr>
+              <a:t> Presentación de avances de proyectos (27/10)</a:t>
             </a:r>
           </a:p>
           <a:p>
             <a:pPr>
               <a:spcAft>
-                <a:spcPts val="600"/>
+                <a:spcPts val="900"/>
               </a:spcAft>
             </a:pPr>
             <a:r>
-              <a:rPr sz="1100" b="0" i="0">
+              <a:rPr sz="1200" b="0" i="0">
                 <a:solidFill>
                   <a:srgbClr val="333333"/>
                 </a:solidFill>
@@ -6560,32 +6440,32 @@
               <a:t>–   </a:t>
             </a:r>
             <a:r>
-              <a:rPr sz="1100" b="1" i="0">
-                <a:solidFill>
-                  <a:srgbClr val="333333"/>
-                </a:solidFill>
-                <a:latin typeface="Calibri"/>
-              </a:rPr>
-              <a:t>Sesión 12 –</a:t>
-            </a:r>
-            <a:r>
-              <a:rPr sz="1100" b="0" i="0">
-                <a:solidFill>
-                  <a:srgbClr val="333333"/>
-                </a:solidFill>
-                <a:latin typeface="Calibri"/>
-              </a:rPr>
-              <a:t> Presentación de avances de proyectos (24/11)</a:t>
+              <a:rPr sz="1200" b="1" i="0">
+                <a:solidFill>
+                  <a:srgbClr val="333333"/>
+                </a:solidFill>
+                <a:latin typeface="Calibri"/>
+              </a:rPr>
+              <a:t>Sesión 9 –</a:t>
+            </a:r>
+            <a:r>
+              <a:rPr sz="1200" b="0" i="0">
+                <a:solidFill>
+                  <a:srgbClr val="333333"/>
+                </a:solidFill>
+                <a:latin typeface="Calibri"/>
+              </a:rPr>
+              <a:t> Evaluación de impacto social y ambiental (03/11)</a:t>
             </a:r>
           </a:p>
           <a:p>
             <a:pPr>
               <a:spcAft>
-                <a:spcPts val="600"/>
+                <a:spcPts val="900"/>
               </a:spcAft>
             </a:pPr>
             <a:r>
-              <a:rPr sz="1100" b="0" i="0">
+              <a:rPr sz="1200" b="0" i="0">
                 <a:solidFill>
                   <a:srgbClr val="333333"/>
                 </a:solidFill>
@@ -6594,32 +6474,32 @@
               <a:t>–   </a:t>
             </a:r>
             <a:r>
-              <a:rPr sz="1100" b="1" i="0">
-                <a:solidFill>
-                  <a:srgbClr val="333333"/>
-                </a:solidFill>
-                <a:latin typeface="Calibri"/>
-              </a:rPr>
-              <a:t>Sesión 13 –</a:t>
-            </a:r>
-            <a:r>
-              <a:rPr sz="1100" b="0" i="0">
-                <a:solidFill>
-                  <a:srgbClr val="333333"/>
-                </a:solidFill>
-                <a:latin typeface="Calibri"/>
-              </a:rPr>
-              <a:t> Evaluación de impacto social y ambiental (01/12)</a:t>
+              <a:rPr sz="1200" b="1" i="0">
+                <a:solidFill>
+                  <a:srgbClr val="333333"/>
+                </a:solidFill>
+                <a:latin typeface="Calibri"/>
+              </a:rPr>
+              <a:t>Sesión 10 –</a:t>
+            </a:r>
+            <a:r>
+              <a:rPr sz="1200" b="0" i="0">
+                <a:solidFill>
+                  <a:srgbClr val="333333"/>
+                </a:solidFill>
+                <a:latin typeface="Calibri"/>
+              </a:rPr>
+              <a:t> Preparación de la presentación final (10/11)</a:t>
             </a:r>
           </a:p>
           <a:p>
             <a:pPr>
               <a:spcAft>
-                <a:spcPts val="600"/>
+                <a:spcPts val="900"/>
               </a:spcAft>
             </a:pPr>
             <a:r>
-              <a:rPr sz="1100" b="0" i="0">
+              <a:rPr sz="1200" b="0" i="0">
                 <a:solidFill>
                   <a:srgbClr val="333333"/>
                 </a:solidFill>
@@ -6628,124 +6508,22 @@
               <a:t>–   </a:t>
             </a:r>
             <a:r>
-              <a:rPr sz="1100" b="1" i="0">
-                <a:solidFill>
-                  <a:srgbClr val="333333"/>
-                </a:solidFill>
-                <a:latin typeface="Calibri"/>
-              </a:rPr>
-              <a:t>Semana autónoma –</a:t>
-            </a:r>
-            <a:r>
-              <a:rPr sz="1100" b="0" i="0">
-                <a:solidFill>
-                  <a:srgbClr val="333333"/>
-                </a:solidFill>
-                <a:latin typeface="Calibri"/>
-              </a:rPr>
-              <a:t> Ensayo general de la exposición final (trabajo de equipo, sin docente) (08/12) · festivo: Inmaculada Concepción · no se pierde, se trabaja</a:t>
-            </a:r>
-          </a:p>
-          <a:p>
-            <a:pPr>
-              <a:spcAft>
-                <a:spcPts val="600"/>
-              </a:spcAft>
-            </a:pPr>
-            <a:r>
-              <a:rPr sz="1100" b="0" i="0">
-                <a:solidFill>
-                  <a:srgbClr val="333333"/>
-                </a:solidFill>
-                <a:latin typeface="Calibri"/>
-              </a:rPr>
-              <a:t>–   </a:t>
-            </a:r>
-            <a:r>
-              <a:rPr sz="1100" b="1" i="0">
-                <a:solidFill>
-                  <a:srgbClr val="333333"/>
-                </a:solidFill>
-                <a:latin typeface="Calibri"/>
-              </a:rPr>
-              <a:t>Sesión 14 –</a:t>
-            </a:r>
-            <a:r>
-              <a:rPr sz="1100" b="0" i="0">
-                <a:solidFill>
-                  <a:srgbClr val="333333"/>
-                </a:solidFill>
-                <a:latin typeface="Calibri"/>
-              </a:rPr>
-              <a:t> Preparación de la presentación final (15/12)</a:t>
-            </a:r>
-          </a:p>
-          <a:p>
-            <a:pPr>
-              <a:spcAft>
-                <a:spcPts val="600"/>
-              </a:spcAft>
-            </a:pPr>
-            <a:r>
-              <a:rPr sz="1100" b="0" i="0">
-                <a:solidFill>
-                  <a:srgbClr val="333333"/>
-                </a:solidFill>
-                <a:latin typeface="Calibri"/>
-              </a:rPr>
-              <a:t>–   </a:t>
-            </a:r>
-            <a:r>
-              <a:rPr sz="1100" b="1" i="0">
-                <a:solidFill>
-                  <a:srgbClr val="333333"/>
-                </a:solidFill>
-                <a:latin typeface="Calibri"/>
-              </a:rPr>
-              <a:t>Sesión 15 –</a:t>
-            </a:r>
-            <a:r>
-              <a:rPr sz="1100" b="0" i="0">
-                <a:solidFill>
-                  <a:srgbClr val="333333"/>
-                </a:solidFill>
-                <a:latin typeface="Calibri"/>
-              </a:rPr>
-              <a:t> Exposición final de proyectos (22/12)</a:t>
-            </a:r>
-          </a:p>
-          <a:p>
-            <a:pPr>
-              <a:spcAft>
-                <a:spcPts val="600"/>
-              </a:spcAft>
-            </a:pPr>
-            <a:r>
-              <a:rPr sz="1100" b="0" i="0">
-                <a:solidFill>
-                  <a:srgbClr val="333333"/>
-                </a:solidFill>
-                <a:latin typeface="Calibri"/>
-              </a:rPr>
-              <a:t>–   </a:t>
-            </a:r>
-            <a:r>
-              <a:rPr sz="1100" b="1" i="0">
-                <a:solidFill>
-                  <a:srgbClr val="333333"/>
-                </a:solidFill>
-                <a:latin typeface="Calibri"/>
-              </a:rPr>
-              <a:t>Sesión 16 –</a:t>
-            </a:r>
-            <a:r>
-              <a:rPr sz="1100" b="0" i="0">
-                <a:solidFill>
-                  <a:srgbClr val="333333"/>
-                </a:solidFill>
-                <a:latin typeface="Calibri"/>
-              </a:rPr>
-              <a:t> Socialización y evaluación final del curso (29/12) · cierra Corte 3 (40%)</a:t>
+              <a:rPr sz="1200" b="1" i="0">
+                <a:solidFill>
+                  <a:srgbClr val="333333"/>
+                </a:solidFill>
+                <a:latin typeface="Calibri"/>
+              </a:rPr>
+              <a:t>Sesión 11 –</a:t>
+            </a:r>
+            <a:r>
+              <a:rPr sz="1200" b="0" i="0">
+                <a:solidFill>
+                  <a:srgbClr val="333333"/>
+                </a:solidFill>
+                <a:latin typeface="Calibri"/>
+              </a:rPr>
+              <a:t> Exposición final de proyectos + Socialización y evaluación final del curso (17/11) · sesión doble · cierra Corte 3 (40%)</a:t>
             </a:r>
           </a:p>
         </p:txBody>
@@ -8763,7 +8541,7 @@
                 </a:solidFill>
                 <a:latin typeface="Calibri"/>
               </a:rPr>
-              <a:t> que se construye desde la sesión 6 y se expone en la 15.</a:t>
+              <a:t> que se construye desde el análisis de problemas y se expone en la última sesión.</a:t>
             </a:r>
           </a:p>
         </p:txBody>
@@ -8978,7 +8756,7 @@
                 </a:solidFill>
                 <a:latin typeface="Calibri"/>
               </a:rPr>
-              <a:t>Las 16 sesiones tienen la misma estructura. La conocen desde hoy para que nadie llegue a los 45 min pensando que todavía hay tiempo.</a:t>
+              <a:t>Las 11 sesiones tienen la misma estructura. La conocen desde hoy para que nadie llegue a los 45 min pensando que todavía hay tiempo.</a:t>
             </a:r>
           </a:p>
         </p:txBody>
@@ -12177,7 +11955,7 @@
                 </a:solidFill>
                 <a:latin typeface="Calibri"/>
               </a:rPr>
-              <a:t>Línea de tiempo (sesión 2), ciclo de vida (sesiones 7 y 8), diagramas del proyecto</a:t>
+              <a:t>Línea de tiempo (Clase 2), ciclo de vida (Clases 7 y 8), diagramas del proyecto</a:t>
             </a:r>
           </a:p>
         </p:txBody>
@@ -12639,7 +12417,7 @@
                 </a:solidFill>
                 <a:latin typeface="Calibri"/>
               </a:rPr>
-              <a:t>Infografía (sesión 7) y póster del proyecto final (sesiones 14 y 15)</a:t>
+              <a:t>Infografía (Clase 7) y póster del proyecto final (Clases 14 y 15)</a:t>
             </a:r>
           </a:p>
         </p:txBody>
@@ -12843,7 +12621,7 @@
                 </a:solidFill>
                 <a:latin typeface="Calibri"/>
               </a:rPr>
-              <a:t>Entrega del taller de equipo de las 16 sesiones (5 preguntas, 100 puntos), el diagnóstico de la sesión 1 y las dos evaluaciones de corte escritas (sesiones 6 y 11)</a:t>
+              <a:t>Entrega del taller de equipo de las 16 Clases del curso (repartidas en 11 sesiones de calendario), el diagnóstico de la Clase 1 y las dos evaluaciones de corte escritas (sesiones 4 y 7 del calendario, Clases 6 y 11)</a:t>
             </a:r>
           </a:p>
         </p:txBody>

--- a/Introduccion a la Ingenieria/Clases/Presentacion del Curso - Introduccion a la Ingenieria - LB141F.pptx
+++ b/Introduccion a la Ingenieria/Clases/Presentacion del Curso - Introduccion a la Ingenieria - LB141F.pptx
@@ -3448,7 +3448,7 @@
                 </a:solidFill>
                 <a:latin typeface="Calibri"/>
               </a:rPr>
-              <a:t>Google Meet</a:t>
+              <a:t>Microsoft Teams</a:t>
             </a:r>
             <a:r>
               <a:rPr sz="1500" b="0" i="0">
@@ -6827,7 +6827,7 @@
                 </a:solidFill>
                 <a:latin typeface="Calibri"/>
               </a:rPr>
-              <a:t>UNIAJC · Ingeniería de Sistemas · Virtual sincrónica por Google Meet</a:t>
+              <a:t>UNIAJC · Ingeniería de Sistemas · Virtual sincrónica por Microsoft Teams</a:t>
             </a:r>
           </a:p>
         </p:txBody>
@@ -9171,7 +9171,7 @@
                 </a:solidFill>
                 <a:latin typeface="Calibri"/>
               </a:rPr>
-              <a:t> — Cinco salas de grupo en Meet, el docente rota por todas</a:t>
+              <a:t> — Cinco salas de grupo en Teams, el docente rota por todas</a:t>
             </a:r>
           </a:p>
         </p:txBody>
@@ -10058,7 +10058,7 @@
                           </a:solidFill>
                           <a:latin typeface="Calibri"/>
                         </a:rPr>
-                        <a:t>Los 5 equipos pasan a sus salas de grupo de Meet y trabajan en paralelo sobre la misma consigna, cada uno en su documento en la nube. El docente entra y sale de las cinco salas (unos 3 min en cada una). A los 15 min se avisa por el chat general y se cierran las salas.</a:t>
+                        <a:t>Los 5 equipos pasan a sus salas de grupo de Teams y trabajan en paralelo sobre la misma consigna, cada uno en su documento en la nube. El docente entra y sale de las cinco salas (unos 3 min en cada una). A los 15 min se avisa por el chat general y se cierran las salas.</a:t>
                       </a:r>
                     </a:p>
                   </a:txBody>
@@ -11294,7 +11294,7 @@
                 </a:solidFill>
                 <a:latin typeface="Calibri"/>
               </a:rPr>
-              <a:t>GM</a:t>
+              <a:t>MT</a:t>
             </a:r>
           </a:p>
         </p:txBody>
@@ -11327,7 +11327,7 @@
                 </a:solidFill>
                 <a:latin typeface="Calibri"/>
               </a:rPr>
-              <a:t>Google Meet</a:t>
+              <a:t>Microsoft Teams</a:t>
             </a:r>
           </a:p>
           <a:p>
